--- a/4 курс/Проектирование информационныхсистем/Презентация Microsoft PowerPoint.pptx
+++ b/4 курс/Проектирование информационныхсистем/Презентация Microsoft PowerPoint.pptx
@@ -120,6 +120,11 @@
       </a:defRPr>
     </a:lvl9pPr>
   </p:defaultTextStyle>
+  <p:extLst>
+    <p:ext uri="{EFAFB233-063F-42B5-8137-9DF3F51BA10A}">
+      <p15:sldGuideLst xmlns:p15="http://schemas.microsoft.com/office/powerpoint/2012/main"/>
+    </p:ext>
+  </p:extLst>
 </p:presentation>
 </file>
 
@@ -205,7 +210,7 @@
           <a:p>
             <a:fld id="{72E3A774-3115-4D5A-A6CC-A362B53F069E}" type="datetimeFigureOut">
               <a:rPr lang="ru-RU" smtClean="0"/>
-              <a:t>03.03.2026</a:t>
+              <a:t>04.03.2026</a:t>
             </a:fld>
             <a:endParaRPr lang="ru-RU"/>
           </a:p>
@@ -752,6 +757,170 @@
           <a:lstStyle/>
           <a:p>
             <a:r>
+              <a:rPr lang="ru-RU" sz="1800" dirty="0">
+                <a:effectLst/>
+                <a:latin typeface="Times New Roman" panose="02020603050405020304" pitchFamily="18" charset="0"/>
+                <a:ea typeface="Calibri" panose="020F0502020204030204" pitchFamily="34" charset="0"/>
+              </a:rPr>
+              <a:t>MRP система (</a:t>
+            </a:r>
+            <a:r>
+              <a:rPr lang="en-US" sz="1800" dirty="0">
+                <a:effectLst/>
+                <a:latin typeface="Times New Roman" panose="02020603050405020304" pitchFamily="18" charset="0"/>
+                <a:ea typeface="Calibri" panose="020F0502020204030204" pitchFamily="34" charset="0"/>
+              </a:rPr>
+              <a:t>M</a:t>
+            </a:r>
+            <a:r>
+              <a:rPr lang="ru-RU" sz="1800" dirty="0" err="1">
+                <a:effectLst/>
+                <a:latin typeface="Times New Roman" panose="02020603050405020304" pitchFamily="18" charset="0"/>
+                <a:ea typeface="Calibri" panose="020F0502020204030204" pitchFamily="34" charset="0"/>
+              </a:rPr>
+              <a:t>aterial</a:t>
+            </a:r>
+            <a:r>
+              <a:rPr lang="ru-RU" sz="1800" dirty="0">
+                <a:effectLst/>
+                <a:latin typeface="Times New Roman" panose="02020603050405020304" pitchFamily="18" charset="0"/>
+                <a:ea typeface="Calibri" panose="020F0502020204030204" pitchFamily="34" charset="0"/>
+              </a:rPr>
+              <a:t> </a:t>
+            </a:r>
+            <a:r>
+              <a:rPr lang="en-US" sz="1800" dirty="0">
+                <a:effectLst/>
+                <a:latin typeface="Times New Roman" panose="02020603050405020304" pitchFamily="18" charset="0"/>
+                <a:ea typeface="Calibri" panose="020F0502020204030204" pitchFamily="34" charset="0"/>
+              </a:rPr>
+              <a:t>R</a:t>
+            </a:r>
+            <a:r>
+              <a:rPr lang="ru-RU" sz="1800" dirty="0" err="1">
+                <a:effectLst/>
+                <a:latin typeface="Times New Roman" panose="02020603050405020304" pitchFamily="18" charset="0"/>
+                <a:ea typeface="Calibri" panose="020F0502020204030204" pitchFamily="34" charset="0"/>
+              </a:rPr>
+              <a:t>equirements</a:t>
+            </a:r>
+            <a:r>
+              <a:rPr lang="ru-RU" sz="1800" dirty="0">
+                <a:effectLst/>
+                <a:latin typeface="Times New Roman" panose="02020603050405020304" pitchFamily="18" charset="0"/>
+                <a:ea typeface="Calibri" panose="020F0502020204030204" pitchFamily="34" charset="0"/>
+              </a:rPr>
+              <a:t> </a:t>
+            </a:r>
+            <a:r>
+              <a:rPr lang="en-US" sz="1800" dirty="0">
+                <a:effectLst/>
+                <a:latin typeface="Times New Roman" panose="02020603050405020304" pitchFamily="18" charset="0"/>
+                <a:ea typeface="Calibri" panose="020F0502020204030204" pitchFamily="34" charset="0"/>
+              </a:rPr>
+              <a:t>P</a:t>
+            </a:r>
+            <a:r>
+              <a:rPr lang="ru-RU" sz="1800" dirty="0" err="1">
+                <a:effectLst/>
+                <a:latin typeface="Times New Roman" panose="02020603050405020304" pitchFamily="18" charset="0"/>
+                <a:ea typeface="Calibri" panose="020F0502020204030204" pitchFamily="34" charset="0"/>
+              </a:rPr>
+              <a:t>lanning</a:t>
+            </a:r>
+            <a:r>
+              <a:rPr lang="ru-RU" sz="1800" dirty="0">
+                <a:effectLst/>
+                <a:latin typeface="Times New Roman" panose="02020603050405020304" pitchFamily="18" charset="0"/>
+                <a:ea typeface="Calibri" panose="020F0502020204030204" pitchFamily="34" charset="0"/>
+              </a:rPr>
+              <a:t>, планирование потребности в материалах) - это компьютеризированная система управления производственными ресурсами, которая позволяет оптимизировать процессы закупки материалов и планирования производства</a:t>
+            </a:r>
+            <a:endParaRPr lang="ru-RU" dirty="0"/>
+          </a:p>
+        </p:txBody>
+      </p:sp>
+      <p:sp>
+        <p:nvSpPr>
+          <p:cNvPr id="4" name="Номер слайда 3"/>
+          <p:cNvSpPr>
+            <a:spLocks noGrp="1"/>
+          </p:cNvSpPr>
+          <p:nvPr>
+            <p:ph type="sldNum" sz="quarter" idx="5"/>
+          </p:nvPr>
+        </p:nvSpPr>
+        <p:spPr/>
+        <p:txBody>
+          <a:bodyPr/>
+          <a:lstStyle/>
+          <a:p>
+            <a:fld id="{5697FD74-FE0E-40A3-90E4-FC2AB9CE9B76}" type="slidenum">
+              <a:rPr lang="ru-RU" smtClean="0"/>
+              <a:t>4</a:t>
+            </a:fld>
+            <a:endParaRPr lang="ru-RU"/>
+          </a:p>
+        </p:txBody>
+      </p:sp>
+    </p:spTree>
+    <p:extLst>
+      <p:ext uri="{BB962C8B-B14F-4D97-AF65-F5344CB8AC3E}">
+        <p14:creationId xmlns:p14="http://schemas.microsoft.com/office/powerpoint/2010/main" val="3870182755"/>
+      </p:ext>
+    </p:extLst>
+  </p:cSld>
+  <p:clrMapOvr>
+    <a:masterClrMapping/>
+  </p:clrMapOvr>
+</p:notes>
+</file>
+
+<file path=ppt/notesSlides/notesSlide4.xml><?xml version="1.0" encoding="utf-8"?>
+<p:notes xmlns:a="http://schemas.openxmlformats.org/drawingml/2006/main" xmlns:r="http://schemas.openxmlformats.org/officeDocument/2006/relationships" xmlns:p="http://schemas.openxmlformats.org/presentationml/2006/main">
+  <p:cSld>
+    <p:spTree>
+      <p:nvGrpSpPr>
+        <p:cNvPr id="1" name=""/>
+        <p:cNvGrpSpPr/>
+        <p:nvPr/>
+      </p:nvGrpSpPr>
+      <p:grpSpPr>
+        <a:xfrm>
+          <a:off x="0" y="0"/>
+          <a:ext cx="0" cy="0"/>
+          <a:chOff x="0" y="0"/>
+          <a:chExt cx="0" cy="0"/>
+        </a:xfrm>
+      </p:grpSpPr>
+      <p:sp>
+        <p:nvSpPr>
+          <p:cNvPr id="2" name="Образ слайда 1"/>
+          <p:cNvSpPr>
+            <a:spLocks noGrp="1" noRot="1" noChangeAspect="1"/>
+          </p:cNvSpPr>
+          <p:nvPr>
+            <p:ph type="sldImg"/>
+          </p:nvPr>
+        </p:nvSpPr>
+        <p:spPr/>
+      </p:sp>
+      <p:sp>
+        <p:nvSpPr>
+          <p:cNvPr id="3" name="Заметки 2"/>
+          <p:cNvSpPr>
+            <a:spLocks noGrp="1"/>
+          </p:cNvSpPr>
+          <p:nvPr>
+            <p:ph type="body" idx="1"/>
+          </p:nvPr>
+        </p:nvSpPr>
+        <p:spPr/>
+        <p:txBody>
+          <a:bodyPr/>
+          <a:lstStyle/>
+          <a:p>
+            <a:r>
               <a:rPr lang="ru-RU" dirty="0"/>
               <a:t>Планируется </a:t>
             </a:r>
@@ -833,7 +1002,7 @@
 </p:notes>
 </file>
 
-<file path=ppt/notesSlides/notesSlide4.xml><?xml version="1.0" encoding="utf-8"?>
+<file path=ppt/notesSlides/notesSlide5.xml><?xml version="1.0" encoding="utf-8"?>
 <p:notes xmlns:a="http://schemas.openxmlformats.org/drawingml/2006/main" xmlns:r="http://schemas.openxmlformats.org/officeDocument/2006/relationships" xmlns:p="http://schemas.openxmlformats.org/presentationml/2006/main">
   <p:cSld>
     <p:spTree>
@@ -1087,7 +1256,7 @@
           <a:p>
             <a:fld id="{2909984B-105B-4EC0-BA71-5BC9FB3CCD50}" type="datetimeFigureOut">
               <a:rPr lang="ru-RU" smtClean="0"/>
-              <a:t>03.03.2026</a:t>
+              <a:t>04.03.2026</a:t>
             </a:fld>
             <a:endParaRPr lang="ru-RU"/>
           </a:p>
@@ -1285,7 +1454,7 @@
           <a:p>
             <a:fld id="{2909984B-105B-4EC0-BA71-5BC9FB3CCD50}" type="datetimeFigureOut">
               <a:rPr lang="ru-RU" smtClean="0"/>
-              <a:t>03.03.2026</a:t>
+              <a:t>04.03.2026</a:t>
             </a:fld>
             <a:endParaRPr lang="ru-RU"/>
           </a:p>
@@ -1493,7 +1662,7 @@
           <a:p>
             <a:fld id="{2909984B-105B-4EC0-BA71-5BC9FB3CCD50}" type="datetimeFigureOut">
               <a:rPr lang="ru-RU" smtClean="0"/>
-              <a:t>03.03.2026</a:t>
+              <a:t>04.03.2026</a:t>
             </a:fld>
             <a:endParaRPr lang="ru-RU"/>
           </a:p>
@@ -1691,7 +1860,7 @@
           <a:p>
             <a:fld id="{2909984B-105B-4EC0-BA71-5BC9FB3CCD50}" type="datetimeFigureOut">
               <a:rPr lang="ru-RU" smtClean="0"/>
-              <a:t>03.03.2026</a:t>
+              <a:t>04.03.2026</a:t>
             </a:fld>
             <a:endParaRPr lang="ru-RU"/>
           </a:p>
@@ -1966,7 +2135,7 @@
           <a:p>
             <a:fld id="{2909984B-105B-4EC0-BA71-5BC9FB3CCD50}" type="datetimeFigureOut">
               <a:rPr lang="ru-RU" smtClean="0"/>
-              <a:t>03.03.2026</a:t>
+              <a:t>04.03.2026</a:t>
             </a:fld>
             <a:endParaRPr lang="ru-RU"/>
           </a:p>
@@ -2231,7 +2400,7 @@
           <a:p>
             <a:fld id="{2909984B-105B-4EC0-BA71-5BC9FB3CCD50}" type="datetimeFigureOut">
               <a:rPr lang="ru-RU" smtClean="0"/>
-              <a:t>03.03.2026</a:t>
+              <a:t>04.03.2026</a:t>
             </a:fld>
             <a:endParaRPr lang="ru-RU"/>
           </a:p>
@@ -2643,7 +2812,7 @@
           <a:p>
             <a:fld id="{2909984B-105B-4EC0-BA71-5BC9FB3CCD50}" type="datetimeFigureOut">
               <a:rPr lang="ru-RU" smtClean="0"/>
-              <a:t>03.03.2026</a:t>
+              <a:t>04.03.2026</a:t>
             </a:fld>
             <a:endParaRPr lang="ru-RU"/>
           </a:p>
@@ -2784,7 +2953,7 @@
           <a:p>
             <a:fld id="{2909984B-105B-4EC0-BA71-5BC9FB3CCD50}" type="datetimeFigureOut">
               <a:rPr lang="ru-RU" smtClean="0"/>
-              <a:t>03.03.2026</a:t>
+              <a:t>04.03.2026</a:t>
             </a:fld>
             <a:endParaRPr lang="ru-RU"/>
           </a:p>
@@ -2897,7 +3066,7 @@
           <a:p>
             <a:fld id="{2909984B-105B-4EC0-BA71-5BC9FB3CCD50}" type="datetimeFigureOut">
               <a:rPr lang="ru-RU" smtClean="0"/>
-              <a:t>03.03.2026</a:t>
+              <a:t>04.03.2026</a:t>
             </a:fld>
             <a:endParaRPr lang="ru-RU"/>
           </a:p>
@@ -3208,7 +3377,7 @@
           <a:p>
             <a:fld id="{2909984B-105B-4EC0-BA71-5BC9FB3CCD50}" type="datetimeFigureOut">
               <a:rPr lang="ru-RU" smtClean="0"/>
-              <a:t>03.03.2026</a:t>
+              <a:t>04.03.2026</a:t>
             </a:fld>
             <a:endParaRPr lang="ru-RU"/>
           </a:p>
@@ -3496,7 +3665,7 @@
           <a:p>
             <a:fld id="{2909984B-105B-4EC0-BA71-5BC9FB3CCD50}" type="datetimeFigureOut">
               <a:rPr lang="ru-RU" smtClean="0"/>
-              <a:t>03.03.2026</a:t>
+              <a:t>04.03.2026</a:t>
             </a:fld>
             <a:endParaRPr lang="ru-RU"/>
           </a:p>
@@ -3737,7 +3906,7 @@
           <a:p>
             <a:fld id="{2909984B-105B-4EC0-BA71-5BC9FB3CCD50}" type="datetimeFigureOut">
               <a:rPr lang="ru-RU" smtClean="0"/>
-              <a:t>03.03.2026</a:t>
+              <a:t>04.03.2026</a:t>
             </a:fld>
             <a:endParaRPr lang="ru-RU"/>
           </a:p>
@@ -4205,7 +4374,12 @@
             <p:ph type="subTitle" idx="1"/>
           </p:nvPr>
         </p:nvSpPr>
-        <p:spPr/>
+        <p:spPr>
+          <a:xfrm>
+            <a:off x="1524000" y="4095344"/>
+            <a:ext cx="9144000" cy="1162455"/>
+          </a:xfrm>
+        </p:spPr>
         <p:txBody>
           <a:bodyPr/>
           <a:lstStyle/>
@@ -4213,6 +4387,41 @@
             <a:r>
               <a:rPr lang="ru-RU" dirty="0"/>
               <a:t>Михайлов И. Р 3-22ПИ</a:t>
+            </a:r>
+          </a:p>
+        </p:txBody>
+      </p:sp>
+      <p:sp>
+        <p:nvSpPr>
+          <p:cNvPr id="5" name="TextBox 4">
+            <a:extLst>
+              <a:ext uri="{FF2B5EF4-FFF2-40B4-BE49-F238E27FC236}">
+                <a16:creationId xmlns:a16="http://schemas.microsoft.com/office/drawing/2014/main" id="{70B1A50C-1219-4BA2-9AD4-7D4C9CB89BCD}"/>
+              </a:ext>
+            </a:extLst>
+          </p:cNvPr>
+          <p:cNvSpPr txBox="1"/>
+          <p:nvPr/>
+        </p:nvSpPr>
+        <p:spPr>
+          <a:xfrm>
+            <a:off x="3892685" y="3509963"/>
+            <a:ext cx="4406629" cy="369332"/>
+          </a:xfrm>
+          <a:prstGeom prst="rect">
+            <a:avLst/>
+          </a:prstGeom>
+          <a:noFill/>
+        </p:spPr>
+        <p:txBody>
+          <a:bodyPr wrap="square" rtlCol="0">
+            <a:spAutoFit/>
+          </a:bodyPr>
+          <a:lstStyle/>
+          <a:p>
+            <a:r>
+              <a:rPr lang="ru-RU" dirty="0"/>
+              <a:t>Проектирование информационных систем</a:t>
             </a:r>
           </a:p>
         </p:txBody>
@@ -5096,7 +5305,7 @@
           </p:nvPr>
         </p:nvPicPr>
         <p:blipFill>
-          <a:blip r:embed="rId2"/>
+          <a:blip r:embed="rId3"/>
           <a:stretch>
             <a:fillRect/>
           </a:stretch>
